--- a/output/test_migration_deck/Java_Microservices_Java.pptx
+++ b/output/test_migration_deck/Java_Microservices_Java.pptx
@@ -3120,8 +3120,8 @@
         </p:nvSpPr>
         <p:spPr>
           <a:xfrm>
-            <a:off x="1981199" y="1174750"/>
-            <a:ext cx="8229599" cy="425449"/>
+            <a:off x="1981199" y="1168400"/>
+            <a:ext cx="8229599" cy="438149"/>
           </a:xfrm>
           <a:prstGeom prst="rect">
             <a:avLst/>
@@ -3137,7 +3137,7 @@
             <a:pPr algn="l">
               <a:defRPr sz="4400" b="1">
                 <a:solidFill>
-                  <a:srgbClr val="425C80"/>
+                  <a:srgbClr val="1E2653"/>
                 </a:solidFill>
                 <a:latin typeface="Arial"/>
               </a:defRPr>
@@ -3171,7 +3171,7 @@
           <a:lstStyle/>
           <a:p>
             <a:pPr algn="l">
-              <a:defRPr sz="1300">
+              <a:defRPr sz="1200">
                 <a:solidFill>
                   <a:srgbClr val="64748B"/>
                 </a:solidFill>
@@ -3192,18 +3192,18 @@
         </p:nvSpPr>
         <p:spPr>
           <a:xfrm>
-            <a:off x="1981199" y="1778000"/>
-            <a:ext cx="3994149" cy="158750"/>
+            <a:off x="1981199" y="1784350"/>
+            <a:ext cx="3505199" cy="2159000"/>
           </a:xfrm>
           <a:prstGeom prst="roundRect">
             <a:avLst/>
           </a:prstGeom>
           <a:solidFill>
-            <a:srgbClr val="FFFFFF"/>
+            <a:srgbClr val="F8FAFC"/>
           </a:solidFill>
           <a:ln w="12700">
             <a:solidFill>
-              <a:srgbClr val="6E9AD6"/>
+              <a:srgbClr val="E2E8F0"/>
             </a:solidFill>
           </a:ln>
         </p:spPr>
@@ -3237,18 +3237,18 @@
         </p:nvSpPr>
         <p:spPr>
           <a:xfrm>
-            <a:off x="6216649" y="1778000"/>
-            <a:ext cx="3994149" cy="939799"/>
+            <a:off x="5740399" y="1784350"/>
+            <a:ext cx="4470399" cy="2159000"/>
           </a:xfrm>
           <a:prstGeom prst="roundRect">
             <a:avLst/>
           </a:prstGeom>
           <a:solidFill>
-            <a:srgbClr val="1E1E2E"/>
+            <a:srgbClr val="0F172A"/>
           </a:solidFill>
-          <a:ln w="19050">
+          <a:ln w="12700">
             <a:solidFill>
-              <a:srgbClr val="6E9AD6"/>
+              <a:srgbClr val="1E293B"/>
             </a:solidFill>
           </a:ln>
         </p:spPr>
@@ -3274,9 +3274,9 @@
               <a:spcAft>
                 <a:spcPts val="800"/>
               </a:spcAft>
-              <a:defRPr sz="1300">
+              <a:defRPr sz="1200">
                 <a:solidFill>
-                  <a:srgbClr val="8C9BAF"/>
+                  <a:srgbClr val="60A5FA"/>
                 </a:solidFill>
                 <a:latin typeface="Consolas"/>
               </a:defRPr>

--- a/output/test_migration_deck/Java_Microservices_Java.pptx
+++ b/output/test_migration_deck/Java_Microservices_Java.pptx
@@ -136,8 +136,8 @@
         </p:nvSpPr>
         <p:spPr>
           <a:xfrm>
-            <a:off x="685800" y="2130425"/>
-            <a:ext cx="7772400" cy="1470025"/>
+            <a:off x="1371600" y="1828800"/>
+            <a:ext cx="9445752" cy="1645920"/>
           </a:xfrm>
         </p:spPr>
         <p:txBody>
@@ -164,8 +164,8 @@
         </p:nvSpPr>
         <p:spPr>
           <a:xfrm>
-            <a:off x="1371600" y="3886200"/>
-            <a:ext cx="6400800" cy="1752600"/>
+            <a:off x="1371600" y="3840480"/>
+            <a:ext cx="9445752" cy="1097280"/>
           </a:xfrm>
         </p:spPr>
         <p:txBody>
@@ -304,7 +304,12 @@
             <p:ph type="ftr" sz="quarter" idx="11"/>
           </p:nvPr>
         </p:nvSpPr>
-        <p:spPr/>
+        <p:spPr>
+          <a:xfrm>
+            <a:off x="1371600" y="6217920"/>
+            <a:ext cx="8229600" cy="320040"/>
+          </a:xfrm>
+        </p:spPr>
         <p:txBody>
           <a:bodyPr/>
           <a:lstStyle/>
@@ -726,7 +731,12 @@
             <p:ph type="title"/>
           </p:nvPr>
         </p:nvSpPr>
-        <p:spPr/>
+        <p:spPr>
+          <a:xfrm>
+            <a:off x="1371600" y="950976"/>
+            <a:ext cx="9445752" cy="640080"/>
+          </a:xfrm>
+        </p:spPr>
         <p:txBody>
           <a:bodyPr/>
           <a:lstStyle/>
@@ -749,7 +759,12 @@
             <p:ph idx="1"/>
           </p:nvPr>
         </p:nvSpPr>
-        <p:spPr/>
+        <p:spPr>
+          <a:xfrm>
+            <a:off x="1371600" y="1709928"/>
+            <a:ext cx="9445752" cy="4297680"/>
+          </a:xfrm>
+        </p:spPr>
         <p:txBody>
           <a:bodyPr/>
           <a:lstStyle/>
@@ -824,7 +839,12 @@
             <p:ph type="ftr" sz="quarter" idx="11"/>
           </p:nvPr>
         </p:nvSpPr>
-        <p:spPr/>
+        <p:spPr>
+          <a:xfrm>
+            <a:off x="1371600" y="6217920"/>
+            <a:ext cx="8229600" cy="320040"/>
+          </a:xfrm>
+        </p:spPr>
         <p:txBody>
           <a:bodyPr/>
           <a:lstStyle/>
@@ -843,7 +863,12 @@
             <p:ph type="sldNum" sz="quarter" idx="12"/>
           </p:nvPr>
         </p:nvSpPr>
-        <p:spPr/>
+        <p:spPr>
+          <a:xfrm>
+            <a:off x="10058400" y="6217920"/>
+            <a:ext cx="914400" cy="320040"/>
+          </a:xfrm>
+        </p:spPr>
         <p:txBody>
           <a:bodyPr/>
           <a:lstStyle/>
@@ -1142,33 +1167,38 @@
             <p:ph type="title"/>
           </p:nvPr>
         </p:nvSpPr>
-        <p:spPr/>
-        <p:txBody>
-          <a:bodyPr/>
-          <a:lstStyle/>
-          <a:p>
-            <a:r>
-              <a:rPr lang="en-US" smtClean="0"/>
-              <a:t>Click to edit Master title style</a:t>
-            </a:r>
-            <a:endParaRPr lang="en-US"/>
-          </a:p>
-        </p:txBody>
-      </p:sp>
-      <p:sp>
-        <p:nvSpPr>
-          <p:cNvPr id="3" name="Content Placeholder 2"/>
-          <p:cNvSpPr>
-            <a:spLocks noGrp="1"/>
-          </p:cNvSpPr>
-          <p:nvPr>
-            <p:ph sz="half" idx="1"/>
-          </p:nvPr>
-        </p:nvSpPr>
         <p:spPr>
           <a:xfrm>
-            <a:off x="457200" y="1600200"/>
-            <a:ext cx="4038600" cy="4525963"/>
+            <a:off x="1371600" y="950976"/>
+            <a:ext cx="9445752" cy="640080"/>
+          </a:xfrm>
+        </p:spPr>
+        <p:txBody>
+          <a:bodyPr/>
+          <a:lstStyle/>
+          <a:p>
+            <a:r>
+              <a:rPr lang="en-US" smtClean="0"/>
+              <a:t>Click to edit Master title style</a:t>
+            </a:r>
+            <a:endParaRPr lang="en-US"/>
+          </a:p>
+        </p:txBody>
+      </p:sp>
+      <p:sp>
+        <p:nvSpPr>
+          <p:cNvPr id="3" name="Content Placeholder 2"/>
+          <p:cNvSpPr>
+            <a:spLocks noGrp="1"/>
+          </p:cNvSpPr>
+          <p:nvPr>
+            <p:ph sz="half" idx="1"/>
+          </p:nvPr>
+        </p:nvSpPr>
+        <p:spPr>
+          <a:xfrm>
+            <a:off x="1371600" y="1709928"/>
+            <a:ext cx="4572000" cy="4297680"/>
           </a:xfrm>
         </p:spPr>
         <p:txBody>
@@ -1252,8 +1282,8 @@
         </p:nvSpPr>
         <p:spPr>
           <a:xfrm>
-            <a:off x="4648200" y="1600200"/>
-            <a:ext cx="4038600" cy="4525963"/>
+            <a:off x="6217920" y="1709928"/>
+            <a:ext cx="4572000" cy="4297680"/>
           </a:xfrm>
         </p:spPr>
         <p:txBody>
@@ -1358,7 +1388,12 @@
             <p:ph type="ftr" sz="quarter" idx="11"/>
           </p:nvPr>
         </p:nvSpPr>
-        <p:spPr/>
+        <p:spPr>
+          <a:xfrm>
+            <a:off x="1371600" y="6217920"/>
+            <a:ext cx="8229600" cy="320040"/>
+          </a:xfrm>
+        </p:spPr>
         <p:txBody>
           <a:bodyPr/>
           <a:lstStyle/>
@@ -1377,7 +1412,12 @@
             <p:ph type="sldNum" sz="quarter" idx="12"/>
           </p:nvPr>
         </p:nvSpPr>
-        <p:spPr/>
+        <p:spPr>
+          <a:xfrm>
+            <a:off x="10058400" y="6217920"/>
+            <a:ext cx="914400" cy="320040"/>
+          </a:xfrm>
+        </p:spPr>
         <p:txBody>
           <a:bodyPr/>
           <a:lstStyle/>
@@ -3090,7 +3130,7 @@
       <p:grpSpPr/>
       <p:pic>
         <p:nvPicPr>
-          <p:cNvPr id="2" name="Picture 1" descr="VIT_background.png"/>
+          <p:cNvPr id="4" name="Picture 3" descr="VIT_background.png"/>
           <p:cNvPicPr>
             <a:picLocks noChangeAspect="1"/>
           </p:cNvPicPr>
@@ -3114,24 +3154,22 @@
       </p:pic>
       <p:sp>
         <p:nvSpPr>
-          <p:cNvPr id="3" name="TextBox 2"/>
-          <p:cNvSpPr txBox="1"/>
-          <p:nvPr/>
+          <p:cNvPr id="2" name="Title 1"/>
+          <p:cNvSpPr>
+            <a:spLocks noGrp="1"/>
+          </p:cNvSpPr>
+          <p:nvPr>
+            <p:ph type="title"/>
+          </p:nvPr>
         </p:nvSpPr>
         <p:spPr>
           <a:xfrm>
             <a:off x="1981199" y="1168400"/>
             <a:ext cx="8229599" cy="438149"/>
           </a:xfrm>
-          <a:prstGeom prst="rect">
-            <a:avLst/>
-          </a:prstGeom>
-          <a:noFill/>
         </p:spPr>
         <p:txBody>
-          <a:bodyPr wrap="square" anchor="ctr">
-            <a:spAutoFit/>
-          </a:bodyPr>
+          <a:bodyPr wrap="square"/>
           <a:lstStyle/>
           <a:p>
             <a:pPr algn="l">
@@ -3150,60 +3188,70 @@
       </p:sp>
       <p:sp>
         <p:nvSpPr>
-          <p:cNvPr id="4" name="TextBox 3"/>
-          <p:cNvSpPr txBox="1"/>
-          <p:nvPr/>
+          <p:cNvPr id="3" name="Content Placeholder 2"/>
+          <p:cNvSpPr>
+            <a:spLocks noGrp="1"/>
+          </p:cNvSpPr>
+          <p:nvPr>
+            <p:ph idx="1"/>
+          </p:nvPr>
         </p:nvSpPr>
         <p:spPr>
           <a:xfrm>
-            <a:off x="1981199" y="5994400"/>
-            <a:ext cx="8229599" cy="152400"/>
+            <a:off x="5740399" y="1784350"/>
+            <a:ext cx="4470399" cy="2159000"/>
+          </a:xfrm>
+        </p:spPr>
+        <p:txBody>
+          <a:bodyPr/>
+          <a:lstStyle/>
+          <a:p/>
+        </p:txBody>
+      </p:sp>
+      <p:pic>
+        <p:nvPicPr>
+          <p:cNvPr id="5" name="Picture 4" descr="dpu_logo.png"/>
+          <p:cNvPicPr>
+            <a:picLocks noChangeAspect="1"/>
+          </p:cNvPicPr>
+          <p:nvPr/>
+        </p:nvPicPr>
+        <p:blipFill>
+          <a:blip r:embed="rId3"/>
+          <a:stretch>
+            <a:fillRect/>
+          </a:stretch>
+        </p:blipFill>
+        <p:spPr>
+          <a:xfrm>
+            <a:off x="365760" y="182880"/>
+            <a:ext cx="2926080" cy="731520"/>
           </a:xfrm>
           <a:prstGeom prst="rect">
             <a:avLst/>
           </a:prstGeom>
-          <a:noFill/>
         </p:spPr>
-        <p:txBody>
-          <a:bodyPr wrap="square">
-            <a:spAutoFit/>
-          </a:bodyPr>
-          <a:lstStyle/>
-          <a:p>
-            <a:pPr algn="l">
-              <a:defRPr sz="1200">
-                <a:solidFill>
-                  <a:srgbClr val="64748B"/>
-                </a:solidFill>
-                <a:latin typeface="Segoe UI"/>
-              </a:defRPr>
-            </a:pPr>
-            <a:r>
-              <a:t>VIT   •   Service   •   Slide 1</a:t>
-            </a:r>
-          </a:p>
-        </p:txBody>
-      </p:sp>
-      <p:sp>
-        <p:nvSpPr>
-          <p:cNvPr id="5" name="Rounded Rectangle 4"/>
+      </p:pic>
+      <p:sp>
+        <p:nvSpPr>
+          <p:cNvPr id="6" name="Rounded Rectangle 5"/>
           <p:cNvSpPr/>
           <p:nvPr/>
         </p:nvSpPr>
         <p:spPr>
           <a:xfrm>
-            <a:off x="1981199" y="1784350"/>
-            <a:ext cx="3505199" cy="2159000"/>
+            <a:off x="5740399" y="1784350"/>
+            <a:ext cx="4470399" cy="2159000"/>
           </a:xfrm>
           <a:prstGeom prst="roundRect">
             <a:avLst/>
           </a:prstGeom>
           <a:solidFill>
-            <a:srgbClr val="F8FAFC"/>
+            <a:srgbClr val="0F172A"/>
           </a:solidFill>
-          <a:ln w="12700">
+          <a:ln w="19050">
             <a:solidFill>
-              <a:srgbClr val="E2E8F0"/>
+              <a:srgbClr val="2563EB"/>
             </a:solidFill>
           </a:ln>
         </p:spPr>
@@ -3222,59 +3270,14 @@
           </a:fontRef>
         </p:style>
         <p:txBody>
-          <a:bodyPr rtlCol="0" anchor="t" wrap="square"/>
-          <a:lstStyle/>
-          <a:p>
-            <a:pPr algn="ctr"/>
-          </a:p>
-        </p:txBody>
-      </p:sp>
-      <p:sp>
-        <p:nvSpPr>
-          <p:cNvPr id="6" name="Rounded Rectangle 5"/>
-          <p:cNvSpPr/>
-          <p:nvPr/>
-        </p:nvSpPr>
-        <p:spPr>
-          <a:xfrm>
-            <a:off x="5740399" y="1784350"/>
-            <a:ext cx="4470399" cy="2159000"/>
-          </a:xfrm>
-          <a:prstGeom prst="roundRect">
-            <a:avLst/>
-          </a:prstGeom>
-          <a:solidFill>
-            <a:srgbClr val="0F172A"/>
-          </a:solidFill>
-          <a:ln w="12700">
-            <a:solidFill>
-              <a:srgbClr val="1E293B"/>
-            </a:solidFill>
-          </a:ln>
-        </p:spPr>
-        <p:style>
-          <a:lnRef idx="1">
-            <a:schemeClr val="accent1"/>
-          </a:lnRef>
-          <a:fillRef idx="3">
-            <a:schemeClr val="accent1"/>
-          </a:fillRef>
-          <a:effectRef idx="2">
-            <a:schemeClr val="accent1"/>
-          </a:effectRef>
-          <a:fontRef idx="minor">
-            <a:schemeClr val="lt1"/>
-          </a:fontRef>
-        </p:style>
-        <p:txBody>
-          <a:bodyPr rtlCol="0" anchor="t" wrap="square"/>
+          <a:bodyPr rtlCol="0" anchor="t" wrap="none"/>
           <a:lstStyle/>
           <a:p>
             <a:pPr algn="ctr">
               <a:spcAft>
-                <a:spcPts val="800"/>
+                <a:spcPts val="600"/>
               </a:spcAft>
-              <a:defRPr sz="1200">
+              <a:defRPr sz="1400">
                 <a:solidFill>
                   <a:srgbClr val="60A5FA"/>
                 </a:solidFill>
@@ -3282,7 +3285,7 @@
               </a:defRPr>
             </a:pPr>
             <a:r>
-              <a:t>// Language: PLAINTEXT</a:t>
+              <a:t>// PLAINTEXT</a:t>
             </a:r>
           </a:p>
           <a:p>
@@ -3290,19 +3293,18 @@
               <a:spcAft>
                 <a:spcPts val="200"/>
               </a:spcAft>
-              <a:defRPr sz="2000">
+              <a:defRPr sz="1400">
                 <a:latin typeface="Consolas"/>
               </a:defRPr>
             </a:pPr>
             <a:r>
-              <a:rPr sz="2000">
+              <a:rPr sz="1400">
                 <a:solidFill>
                   <a:srgbClr val="F0F4FA"/>
                 </a:solidFill>
                 <a:latin typeface="Consolas"/>
               </a:rPr>
-              <a:t>// Pinned runtime upgrade: Java 21
-</a:t>
+              <a:t>// Pinned runtime upgrade: Java 21</a:t>
             </a:r>
           </a:p>
           <a:p>
@@ -3310,19 +3312,18 @@
               <a:spcAft>
                 <a:spcPts val="200"/>
               </a:spcAft>
-              <a:defRPr sz="2000">
+              <a:defRPr sz="1400">
                 <a:latin typeface="Consolas"/>
               </a:defRPr>
             </a:pPr>
             <a:r>
-              <a:rPr sz="2000">
+              <a:rPr sz="1400">
                 <a:solidFill>
                   <a:srgbClr val="F0F4FA"/>
                 </a:solidFill>
                 <a:latin typeface="Consolas"/>
               </a:rPr>
-              <a:t>import jakarta.servlet.http.HttpServlet;
-</a:t>
+              <a:t>import jakarta.servlet.http.HttpServlet;</a:t>
             </a:r>
           </a:p>
           <a:p>
@@ -3330,19 +3331,54 @@
               <a:spcAft>
                 <a:spcPts val="200"/>
               </a:spcAft>
-              <a:defRPr sz="2000">
+              <a:defRPr sz="1400">
                 <a:latin typeface="Consolas"/>
               </a:defRPr>
             </a:pPr>
             <a:r>
-              <a:rPr sz="2000">
+              <a:rPr sz="1400">
                 <a:solidFill>
                   <a:srgbClr val="F0F4FA"/>
                 </a:solidFill>
                 <a:latin typeface="Consolas"/>
               </a:rPr>
-              <a:t>public class Solution {}
-</a:t>
+              <a:t>public class Solution {}</a:t>
+            </a:r>
+          </a:p>
+        </p:txBody>
+      </p:sp>
+      <p:sp>
+        <p:nvSpPr>
+          <p:cNvPr id="7" name="Footer Placeholder"/>
+          <p:cNvSpPr txBox="1"/>
+          <p:nvPr/>
+        </p:nvSpPr>
+        <p:spPr>
+          <a:xfrm>
+            <a:off x="1981199" y="5994400"/>
+            <a:ext cx="8229599" cy="152400"/>
+          </a:xfrm>
+          <a:prstGeom prst="rect">
+            <a:avLst/>
+          </a:prstGeom>
+          <a:noFill/>
+        </p:spPr>
+        <p:txBody>
+          <a:bodyPr wrap="square">
+            <a:spAutoFit/>
+          </a:bodyPr>
+          <a:lstStyle/>
+          <a:p>
+            <a:pPr algn="l">
+              <a:defRPr sz="1100">
+                <a:solidFill>
+                  <a:srgbClr val="64748B"/>
+                </a:solidFill>
+                <a:latin typeface="Segoe UI"/>
+              </a:defRPr>
+            </a:pPr>
+            <a:r>
+              <a:t>VIT   •   Service</a:t>
             </a:r>
           </a:p>
         </p:txBody>
